--- a/assets/TCS302/Unit-2/Lecture14_Deque_PriorityQueue_LinkedQueue.pptx
+++ b/assets/TCS302/Unit-2/Lecture14_Deque_PriorityQueue_LinkedQueue.pptx
@@ -2835,90 +2835,6 @@
           </a:p>
         </p:txBody>
       </p:sp>
-      <p:sp>
-        <p:nvSpPr>
-          <p:cNvPr id="11" name="Shape 9"/>
-          <p:cNvSpPr/>
-          <p:nvPr/>
-        </p:nvSpPr>
-        <p:spPr>
-          <a:xfrm>
-            <a:off x="457200" y="4160520"/>
-            <a:ext cx="8229600" cy="502920"/>
-          </a:xfrm>
-          <a:prstGeom prst="roundRect">
-            <a:avLst>
-              <a:gd name="adj" fmla="val 12727"/>
-            </a:avLst>
-          </a:prstGeom>
-          <a:solidFill>
-            <a:srgbClr val="EEF3FB"/>
-          </a:solidFill>
-          <a:ln w="12700">
-            <a:solidFill>
-              <a:srgbClr val="1E2761"/>
-            </a:solidFill>
-            <a:prstDash val="solid"/>
-          </a:ln>
-        </p:spPr>
-        <p:txBody>
-          <a:bodyPr/>
-          <a:lstStyle/>
-          <a:p>
-            <a:endParaRPr lang="en-US"/>
-          </a:p>
-        </p:txBody>
-      </p:sp>
-      <p:sp>
-        <p:nvSpPr>
-          <p:cNvPr id="12" name="Text 10"/>
-          <p:cNvSpPr/>
-          <p:nvPr/>
-        </p:nvSpPr>
-        <p:spPr>
-          <a:xfrm>
-            <a:off x="640080" y="4160520"/>
-            <a:ext cx="7863840" cy="502920"/>
-          </a:xfrm>
-          <a:prstGeom prst="rect">
-            <a:avLst/>
-          </a:prstGeom>
-          <a:noFill/>
-          <a:ln/>
-        </p:spPr>
-        <p:txBody>
-          <a:bodyPr wrap="square" lIns="0" tIns="0" rIns="0" bIns="0" rtlCol="0" anchor="ctr"/>
-          <a:lstStyle/>
-          <a:p>
-            <a:pPr marL="0" indent="0">
-              <a:buNone/>
-            </a:pPr>
-            <a:r>
-              <a:rPr lang="en-US" sz="1200" b="1" dirty="0">
-                <a:solidFill>
-                  <a:srgbClr val="1E2761"/>
-                </a:solidFill>
-                <a:latin typeface="Calibri" pitchFamily="34" charset="0"/>
-                <a:ea typeface="Calibri" pitchFamily="34" charset="-122"/>
-                <a:cs typeface="Calibri" pitchFamily="34" charset="-120"/>
-              </a:rPr>
-              <a:t>ASK   </a:t>
-            </a:r>
-            <a:r>
-              <a:rPr lang="en-US" sz="1250" i="1" dirty="0">
-                <a:solidFill>
-                  <a:srgbClr val="2B2B2B"/>
-                </a:solidFill>
-                <a:latin typeface="Calibri" pitchFamily="34" charset="0"/>
-                <a:ea typeface="Calibri" pitchFamily="34" charset="-122"/>
-                <a:cs typeface="Calibri" pitchFamily="34" charset="-120"/>
-              </a:rPr>
-              <a:t>If a linked queue kept ONLY a front pointer (no rear), which operation would become slow, and why?</a:t>
-            </a:r>
-            <a:endParaRPr lang="en-US" sz="1200" dirty="0"/>
-          </a:p>
-        </p:txBody>
-      </p:sp>
     </p:spTree>
   </p:cSld>
   <p:clrMapOvr>
@@ -3491,8 +3407,8 @@
         </p:nvSpPr>
         <p:spPr>
           <a:xfrm>
-            <a:off x="457200" y="3794760"/>
-            <a:ext cx="8229600" cy="914400"/>
+            <a:off x="457200" y="4039984"/>
+            <a:ext cx="8229600" cy="448889"/>
           </a:xfrm>
           <a:prstGeom prst="roundRect">
             <a:avLst>
@@ -4892,90 +4808,6 @@
           </a:p>
         </p:txBody>
       </p:sp>
-      <p:sp>
-        <p:nvSpPr>
-          <p:cNvPr id="11" name="Shape 9"/>
-          <p:cNvSpPr/>
-          <p:nvPr/>
-        </p:nvSpPr>
-        <p:spPr>
-          <a:xfrm>
-            <a:off x="5532120" y="4297680"/>
-            <a:ext cx="3154680" cy="731520"/>
-          </a:xfrm>
-          <a:prstGeom prst="roundRect">
-            <a:avLst>
-              <a:gd name="adj" fmla="val 8750"/>
-            </a:avLst>
-          </a:prstGeom>
-          <a:solidFill>
-            <a:srgbClr val="EEF3FB"/>
-          </a:solidFill>
-          <a:ln w="12700">
-            <a:solidFill>
-              <a:srgbClr val="1E2761"/>
-            </a:solidFill>
-            <a:prstDash val="solid"/>
-          </a:ln>
-        </p:spPr>
-        <p:txBody>
-          <a:bodyPr/>
-          <a:lstStyle/>
-          <a:p>
-            <a:endParaRPr lang="en-US"/>
-          </a:p>
-        </p:txBody>
-      </p:sp>
-      <p:sp>
-        <p:nvSpPr>
-          <p:cNvPr id="12" name="Text 10"/>
-          <p:cNvSpPr/>
-          <p:nvPr/>
-        </p:nvSpPr>
-        <p:spPr>
-          <a:xfrm>
-            <a:off x="5715000" y="4297680"/>
-            <a:ext cx="2788920" cy="731520"/>
-          </a:xfrm>
-          <a:prstGeom prst="rect">
-            <a:avLst/>
-          </a:prstGeom>
-          <a:noFill/>
-          <a:ln/>
-        </p:spPr>
-        <p:txBody>
-          <a:bodyPr wrap="square" lIns="0" tIns="0" rIns="0" bIns="0" rtlCol="0" anchor="ctr"/>
-          <a:lstStyle/>
-          <a:p>
-            <a:pPr marL="0" indent="0">
-              <a:buNone/>
-            </a:pPr>
-            <a:r>
-              <a:rPr lang="en-US" sz="1200" b="1" dirty="0">
-                <a:solidFill>
-                  <a:srgbClr val="1E2761"/>
-                </a:solidFill>
-                <a:latin typeface="Calibri" pitchFamily="34" charset="0"/>
-                <a:ea typeface="Calibri" pitchFamily="34" charset="-122"/>
-                <a:cs typeface="Calibri" pitchFamily="34" charset="-120"/>
-              </a:rPr>
-              <a:t>ASK   </a:t>
-            </a:r>
-            <a:r>
-              <a:rPr lang="en-US" sz="1250" i="1" dirty="0">
-                <a:solidFill>
-                  <a:srgbClr val="2B2B2B"/>
-                </a:solidFill>
-                <a:latin typeface="Calibri" pitchFamily="34" charset="0"/>
-                <a:ea typeface="Calibri" pitchFamily="34" charset="-122"/>
-                <a:cs typeface="Calibri" pitchFamily="34" charset="-120"/>
-              </a:rPr>
-              <a:t>Forget the "if (q-&gt;front == NULL) q-&gt;rear = NULL" line. What breaks, and when would you notice?</a:t>
-            </a:r>
-            <a:endParaRPr lang="en-US" sz="1200" dirty="0"/>
-          </a:p>
-        </p:txBody>
-      </p:sp>
     </p:spTree>
   </p:cSld>
   <p:clrMapOvr>
@@ -5173,7 +5005,7 @@
         </p:nvGraphicFramePr>
         <p:xfrm>
           <a:off x="457200" y="1234440"/>
-          <a:ext cx="8229600" cy="914400"/>
+          <a:ext cx="8229600" cy="2514600"/>
         </p:xfrm>
         <a:graphic>
           <a:graphicData uri="http://schemas.openxmlformats.org/drawingml/2006/table">
@@ -7224,45 +7056,6 @@
           </a:p>
         </p:txBody>
       </p:sp>
-      <p:sp>
-        <p:nvSpPr>
-          <p:cNvPr id="7" name="Text 5"/>
-          <p:cNvSpPr/>
-          <p:nvPr/>
-        </p:nvSpPr>
-        <p:spPr>
-          <a:xfrm>
-            <a:off x="640080" y="4800600"/>
-            <a:ext cx="7863840" cy="274320"/>
-          </a:xfrm>
-          <a:prstGeom prst="rect">
-            <a:avLst/>
-          </a:prstGeom>
-          <a:noFill/>
-          <a:ln/>
-        </p:spPr>
-        <p:txBody>
-          <a:bodyPr wrap="square" lIns="0" tIns="0" rIns="0" bIns="0" rtlCol="0" anchor="ctr"/>
-          <a:lstStyle/>
-          <a:p>
-            <a:pPr marL="0" indent="0">
-              <a:buNone/>
-            </a:pPr>
-            <a:r>
-              <a:rPr lang="en-US" sz="1100" i="1" dirty="0">
-                <a:solidFill>
-                  <a:srgbClr val="CADCFC"/>
-                </a:solidFill>
-                <a:latin typeface="Calibri" pitchFamily="34" charset="0"/>
-                <a:ea typeface="Calibri" pitchFamily="34" charset="-122"/>
-                <a:cs typeface="Calibri" pitchFamily="34" charset="-120"/>
-              </a:rPr>
-              <a:t>Next lecture: linked lists — nodes, traversal, and insertion from first principles</a:t>
-            </a:r>
-            <a:endParaRPr lang="en-US" sz="1100" dirty="0"/>
-          </a:p>
-        </p:txBody>
-      </p:sp>
     </p:spTree>
   </p:cSld>
   <p:clrMapOvr>
@@ -7631,90 +7424,6 @@
           </a:p>
         </p:txBody>
       </p:sp>
-      <p:sp>
-        <p:nvSpPr>
-          <p:cNvPr id="9" name="Shape 7"/>
-          <p:cNvSpPr/>
-          <p:nvPr/>
-        </p:nvSpPr>
-        <p:spPr>
-          <a:xfrm>
-            <a:off x="457200" y="4160520"/>
-            <a:ext cx="8229600" cy="502920"/>
-          </a:xfrm>
-          <a:prstGeom prst="roundRect">
-            <a:avLst>
-              <a:gd name="adj" fmla="val 12727"/>
-            </a:avLst>
-          </a:prstGeom>
-          <a:solidFill>
-            <a:srgbClr val="EEF3FB"/>
-          </a:solidFill>
-          <a:ln w="12700">
-            <a:solidFill>
-              <a:srgbClr val="1E2761"/>
-            </a:solidFill>
-            <a:prstDash val="solid"/>
-          </a:ln>
-        </p:spPr>
-        <p:txBody>
-          <a:bodyPr/>
-          <a:lstStyle/>
-          <a:p>
-            <a:endParaRPr lang="en-US"/>
-          </a:p>
-        </p:txBody>
-      </p:sp>
-      <p:sp>
-        <p:nvSpPr>
-          <p:cNvPr id="10" name="Text 8"/>
-          <p:cNvSpPr/>
-          <p:nvPr/>
-        </p:nvSpPr>
-        <p:spPr>
-          <a:xfrm>
-            <a:off x="640080" y="4160520"/>
-            <a:ext cx="7863840" cy="502920"/>
-          </a:xfrm>
-          <a:prstGeom prst="rect">
-            <a:avLst/>
-          </a:prstGeom>
-          <a:noFill/>
-          <a:ln/>
-        </p:spPr>
-        <p:txBody>
-          <a:bodyPr wrap="square" lIns="0" tIns="0" rIns="0" bIns="0" rtlCol="0" anchor="ctr"/>
-          <a:lstStyle/>
-          <a:p>
-            <a:pPr marL="0" indent="0">
-              <a:buNone/>
-            </a:pPr>
-            <a:r>
-              <a:rPr lang="en-US" sz="1200" b="1" dirty="0">
-                <a:solidFill>
-                  <a:srgbClr val="1E2761"/>
-                </a:solidFill>
-                <a:latin typeface="Calibri" pitchFamily="34" charset="0"/>
-                <a:ea typeface="Calibri" pitchFamily="34" charset="-122"/>
-                <a:cs typeface="Calibri" pitchFamily="34" charset="-120"/>
-              </a:rPr>
-              <a:t>ASK   </a:t>
-            </a:r>
-            <a:r>
-              <a:rPr lang="en-US" sz="1250" i="1" dirty="0">
-                <a:solidFill>
-                  <a:srgbClr val="2B2B2B"/>
-                </a:solidFill>
-                <a:latin typeface="Calibri" pitchFamily="34" charset="0"/>
-                <a:ea typeface="Calibri" pitchFamily="34" charset="-122"/>
-                <a:cs typeface="Calibri" pitchFamily="34" charset="-120"/>
-              </a:rPr>
-              <a:t>Which of the three ideas above sounds most like how a hospital emergency room actually works?</a:t>
-            </a:r>
-            <a:endParaRPr lang="en-US" sz="1200" dirty="0"/>
-          </a:p>
-        </p:txBody>
-      </p:sp>
     </p:spTree>
   </p:cSld>
   <p:clrMapOvr>
@@ -8420,90 +8129,6 @@
               <a:t>Four operations: insertFront, insertRear, deleteFront, deleteRear.</a:t>
             </a:r>
             <a:endParaRPr lang="en-US" sz="1400" dirty="0"/>
-          </a:p>
-        </p:txBody>
-      </p:sp>
-      <p:sp>
-        <p:nvSpPr>
-          <p:cNvPr id="19" name="Shape 17"/>
-          <p:cNvSpPr/>
-          <p:nvPr/>
-        </p:nvSpPr>
-        <p:spPr>
-          <a:xfrm>
-            <a:off x="457200" y="4160520"/>
-            <a:ext cx="8229600" cy="502920"/>
-          </a:xfrm>
-          <a:prstGeom prst="roundRect">
-            <a:avLst>
-              <a:gd name="adj" fmla="val 12727"/>
-            </a:avLst>
-          </a:prstGeom>
-          <a:solidFill>
-            <a:srgbClr val="EEF3FB"/>
-          </a:solidFill>
-          <a:ln w="12700">
-            <a:solidFill>
-              <a:srgbClr val="1E2761"/>
-            </a:solidFill>
-            <a:prstDash val="solid"/>
-          </a:ln>
-        </p:spPr>
-        <p:txBody>
-          <a:bodyPr/>
-          <a:lstStyle/>
-          <a:p>
-            <a:endParaRPr lang="en-US"/>
-          </a:p>
-        </p:txBody>
-      </p:sp>
-      <p:sp>
-        <p:nvSpPr>
-          <p:cNvPr id="20" name="Text 18"/>
-          <p:cNvSpPr/>
-          <p:nvPr/>
-        </p:nvSpPr>
-        <p:spPr>
-          <a:xfrm>
-            <a:off x="640080" y="4160520"/>
-            <a:ext cx="7863840" cy="502920"/>
-          </a:xfrm>
-          <a:prstGeom prst="rect">
-            <a:avLst/>
-          </a:prstGeom>
-          <a:noFill/>
-          <a:ln/>
-        </p:spPr>
-        <p:txBody>
-          <a:bodyPr wrap="square" lIns="0" tIns="0" rIns="0" bIns="0" rtlCol="0" anchor="ctr"/>
-          <a:lstStyle/>
-          <a:p>
-            <a:pPr marL="0" indent="0">
-              <a:buNone/>
-            </a:pPr>
-            <a:r>
-              <a:rPr lang="en-US" sz="1200" b="1" dirty="0">
-                <a:solidFill>
-                  <a:srgbClr val="1E2761"/>
-                </a:solidFill>
-                <a:latin typeface="Calibri" pitchFamily="34" charset="0"/>
-                <a:ea typeface="Calibri" pitchFamily="34" charset="-122"/>
-                <a:cs typeface="Calibri" pitchFamily="34" charset="-120"/>
-              </a:rPr>
-              <a:t>ASK   </a:t>
-            </a:r>
-            <a:r>
-              <a:rPr lang="en-US" sz="1250" i="1" dirty="0">
-                <a:solidFill>
-                  <a:srgbClr val="2B2B2B"/>
-                </a:solidFill>
-                <a:latin typeface="Calibri" pitchFamily="34" charset="0"/>
-                <a:ea typeface="Calibri" pitchFamily="34" charset="-122"/>
-                <a:cs typeface="Calibri" pitchFamily="34" charset="-120"/>
-              </a:rPr>
-              <a:t>If you only ever use insertRear and deleteFront on a deque, what have you built? What about insertFront and deleteFront only?</a:t>
-            </a:r>
-            <a:endParaRPr lang="en-US" sz="1200" dirty="0"/>
           </a:p>
         </p:txBody>
       </p:sp>
@@ -11582,90 +11207,6 @@
           </a:p>
         </p:txBody>
       </p:sp>
-      <p:sp>
-        <p:nvSpPr>
-          <p:cNvPr id="11" name="Shape 9"/>
-          <p:cNvSpPr/>
-          <p:nvPr/>
-        </p:nvSpPr>
-        <p:spPr>
-          <a:xfrm>
-            <a:off x="457200" y="4160520"/>
-            <a:ext cx="8229600" cy="502920"/>
-          </a:xfrm>
-          <a:prstGeom prst="roundRect">
-            <a:avLst>
-              <a:gd name="adj" fmla="val 12727"/>
-            </a:avLst>
-          </a:prstGeom>
-          <a:solidFill>
-            <a:srgbClr val="EEF3FB"/>
-          </a:solidFill>
-          <a:ln w="12700">
-            <a:solidFill>
-              <a:srgbClr val="1E2761"/>
-            </a:solidFill>
-            <a:prstDash val="solid"/>
-          </a:ln>
-        </p:spPr>
-        <p:txBody>
-          <a:bodyPr/>
-          <a:lstStyle/>
-          <a:p>
-            <a:endParaRPr lang="en-US"/>
-          </a:p>
-        </p:txBody>
-      </p:sp>
-      <p:sp>
-        <p:nvSpPr>
-          <p:cNvPr id="12" name="Text 10"/>
-          <p:cNvSpPr/>
-          <p:nvPr/>
-        </p:nvSpPr>
-        <p:spPr>
-          <a:xfrm>
-            <a:off x="640080" y="4160520"/>
-            <a:ext cx="7863840" cy="502920"/>
-          </a:xfrm>
-          <a:prstGeom prst="rect">
-            <a:avLst/>
-          </a:prstGeom>
-          <a:noFill/>
-          <a:ln/>
-        </p:spPr>
-        <p:txBody>
-          <a:bodyPr wrap="square" lIns="0" tIns="0" rIns="0" bIns="0" rtlCol="0" anchor="ctr"/>
-          <a:lstStyle/>
-          <a:p>
-            <a:pPr marL="0" indent="0">
-              <a:buNone/>
-            </a:pPr>
-            <a:r>
-              <a:rPr lang="en-US" sz="1200" b="1" dirty="0">
-                <a:solidFill>
-                  <a:srgbClr val="1E2761"/>
-                </a:solidFill>
-                <a:latin typeface="Calibri" pitchFamily="34" charset="0"/>
-                <a:ea typeface="Calibri" pitchFamily="34" charset="-122"/>
-                <a:cs typeface="Calibri" pitchFamily="34" charset="-120"/>
-              </a:rPr>
-              <a:t>ASK   </a:t>
-            </a:r>
-            <a:r>
-              <a:rPr lang="en-US" sz="1250" i="1" dirty="0">
-                <a:solidFill>
-                  <a:srgbClr val="2B2B2B"/>
-                </a:solidFill>
-                <a:latin typeface="Calibri" pitchFamily="34" charset="0"/>
-                <a:ea typeface="Calibri" pitchFamily="34" charset="-122"/>
-                <a:cs typeface="Calibri" pitchFamily="34" charset="-120"/>
-              </a:rPr>
-              <a:t>Can two elements ever have the same priority? If so, which should leave first — does FIFO make a comeback?</a:t>
-            </a:r>
-            <a:endParaRPr lang="en-US" sz="1200" dirty="0"/>
-          </a:p>
-        </p:txBody>
-      </p:sp>
     </p:spTree>
   </p:cSld>
   <p:clrMapOvr>
@@ -13631,90 +13172,6 @@
               <a:t>A HEAP (Unit III) gives both insert and removeHighest in O(log n) — the standard, efficient priority queue used in real systems.</a:t>
             </a:r>
             <a:endParaRPr lang="en-US" sz="1250" dirty="0"/>
-          </a:p>
-        </p:txBody>
-      </p:sp>
-      <p:sp>
-        <p:nvSpPr>
-          <p:cNvPr id="12" name="Shape 10"/>
-          <p:cNvSpPr/>
-          <p:nvPr/>
-        </p:nvSpPr>
-        <p:spPr>
-          <a:xfrm>
-            <a:off x="457200" y="4206240"/>
-            <a:ext cx="8229600" cy="502920"/>
-          </a:xfrm>
-          <a:prstGeom prst="roundRect">
-            <a:avLst>
-              <a:gd name="adj" fmla="val 12727"/>
-            </a:avLst>
-          </a:prstGeom>
-          <a:solidFill>
-            <a:srgbClr val="EEF3FB"/>
-          </a:solidFill>
-          <a:ln w="12700">
-            <a:solidFill>
-              <a:srgbClr val="1E2761"/>
-            </a:solidFill>
-            <a:prstDash val="solid"/>
-          </a:ln>
-        </p:spPr>
-        <p:txBody>
-          <a:bodyPr/>
-          <a:lstStyle/>
-          <a:p>
-            <a:endParaRPr lang="en-US"/>
-          </a:p>
-        </p:txBody>
-      </p:sp>
-      <p:sp>
-        <p:nvSpPr>
-          <p:cNvPr id="13" name="Text 11"/>
-          <p:cNvSpPr/>
-          <p:nvPr/>
-        </p:nvSpPr>
-        <p:spPr>
-          <a:xfrm>
-            <a:off x="640080" y="4206240"/>
-            <a:ext cx="7863840" cy="502920"/>
-          </a:xfrm>
-          <a:prstGeom prst="rect">
-            <a:avLst/>
-          </a:prstGeom>
-          <a:noFill/>
-          <a:ln/>
-        </p:spPr>
-        <p:txBody>
-          <a:bodyPr wrap="square" lIns="0" tIns="0" rIns="0" bIns="0" rtlCol="0" anchor="ctr"/>
-          <a:lstStyle/>
-          <a:p>
-            <a:pPr marL="0" indent="0">
-              <a:buNone/>
-            </a:pPr>
-            <a:r>
-              <a:rPr lang="en-US" sz="1200" b="1" dirty="0">
-                <a:solidFill>
-                  <a:srgbClr val="1E2761"/>
-                </a:solidFill>
-                <a:latin typeface="Calibri" pitchFamily="34" charset="0"/>
-                <a:ea typeface="Calibri" pitchFamily="34" charset="-122"/>
-                <a:cs typeface="Calibri" pitchFamily="34" charset="-120"/>
-              </a:rPr>
-              <a:t>ASK   </a:t>
-            </a:r>
-            <a:r>
-              <a:rPr lang="en-US" sz="1250" i="1" dirty="0">
-                <a:solidFill>
-                  <a:srgbClr val="2B2B2B"/>
-                </a:solidFill>
-                <a:latin typeface="Calibri" pitchFamily="34" charset="0"/>
-                <a:ea typeface="Calibri" pitchFamily="34" charset="-122"/>
-                <a:cs typeface="Calibri" pitchFamily="34" charset="-120"/>
-              </a:rPr>
-              <a:t>With n elements already in the queue, roughly how many comparisons does one removeHighest cost here?</a:t>
-            </a:r>
-            <a:endParaRPr lang="en-US" sz="1200" dirty="0"/>
           </a:p>
         </p:txBody>
       </p:sp>
